--- a/BACKUP&RECOVERY/13장/13장_RMAN_개요와_Recovery_Catalog.pptx
+++ b/BACKUP&RECOVERY/13장/13장_RMAN_개요와_Recovery_Catalog.pptx
@@ -11717,7 +11717,7 @@
                 <a:latin typeface="Consolas"/>
                 <a:ea typeface="Consolas"/>
               </a:rPr>
-              <a:t>Archive Log 14   05-MAY-25        /u02/arch1/1_14_119...</a:t>
+              <a:t>Archive Log 14   05-MAY-25        /home/oracle/arch1/1_14_119...</a:t>
             </a:r>
           </a:p>
           <a:p>
@@ -12257,7 +12257,7 @@
                 <a:latin typeface="Consolas"/>
                 <a:ea typeface="Consolas"/>
               </a:rPr>
-              <a:t>7    9     /u02/oradata/ORCL/users01.dbf</a:t>
+              <a:t>7    9     /u01/app/oracle/oradata/orcl/users01.dbf</a:t>
             </a:r>
           </a:p>
           <a:p>
@@ -18177,7 +18177,7 @@
                 <a:latin typeface="Consolas"/>
                 <a:ea typeface="Consolas"/>
               </a:rPr>
-              <a:t>1    890      SYSTEM         YES     /u02/oradata/ORCL/system01.dbf</a:t>
+              <a:t>1    890      SYSTEM         YES     /u01/app/oracle/oradata/orcl/system01.dbf</a:t>
             </a:r>
           </a:p>
           <a:p>
@@ -18194,7 +18194,7 @@
                 <a:latin typeface="Consolas"/>
                 <a:ea typeface="Consolas"/>
               </a:rPr>
-              <a:t>3    550      SYSAUX         NO      /u02/oradata/ORCL/sysaux01.dbf</a:t>
+              <a:t>3    550      SYSAUX         NO      /u01/app/oracle/oradata/orcl/sysaux01.dbf</a:t>
             </a:r>
           </a:p>
           <a:p>
@@ -18211,7 +18211,7 @@
                 <a:latin typeface="Consolas"/>
                 <a:ea typeface="Consolas"/>
               </a:rPr>
-              <a:t>4    320      UNDOTBS1       YES     /u02/oradata/ORCL/undotbs01.dbf</a:t>
+              <a:t>4    320      UNDOTBS1       YES     /u01/app/oracle/oradata/orcl/undotbs01.dbf</a:t>
             </a:r>
           </a:p>
           <a:p>
@@ -18228,7 +18228,7 @@
                 <a:latin typeface="Consolas"/>
                 <a:ea typeface="Consolas"/>
               </a:rPr>
-              <a:t>7    10       USERS          NO      /u02/oradata/ORCL/users01.dbf</a:t>
+              <a:t>7    10       USERS          NO      /u01/app/oracle/oradata/orcl/users01.dbf</a:t>
             </a:r>
           </a:p>
           <a:p>
@@ -18296,7 +18296,7 @@
                 <a:latin typeface="Consolas"/>
                 <a:ea typeface="Consolas"/>
               </a:rPr>
-              <a:t>1    60       TEMP           32767   /u02/oradata/ORCL/temp01.dbf</a:t>
+              <a:t>1    60       TEMP           32767   /u01/app/oracle/oradata/orcl/temp01.dbf</a:t>
             </a:r>
           </a:p>
         </p:txBody>
